--- a/apps/resources/bundled_files/6-klass-payyz-sabak.pptx
+++ b/apps/resources/bundled_files/6-klass-payyz-sabak.pptx
@@ -5196,7 +5196,7 @@
                 </a:solidFill>
                 <a:latin typeface="PT Sans"/>
               </a:rPr>
-              <a:t>6-класс · Математика</a:t>
+              <a:t/>
             </a:r>
           </a:p>
         </p:txBody>
@@ -5400,7 +5400,7 @@
                 </a:solidFill>
                 <a:latin typeface="PT Sans"/>
               </a:rPr>
-              <a:t>Китеп: Стандарт 2018, 6-класс «Пайыз»; Cambridge Stage 6 (пайыз). Мурунку пакеттер: «Бөлчөк, ондук бөлчөк жана пайыз», «Пропорция жана процент». Мазмуну оригиналдуу.</a:t>
+              <a:t>Китеп: Стандарт 2018, 6-класс «Пайыз» (пайыз). Мурунку пакеттер: «Бөлчөк, ондук бөлчөк жана пайыз», «Пропорция жана процент». Мазмуну оригиналдуу.</a:t>
             </a:r>
           </a:p>
         </p:txBody>
@@ -5688,7 +5688,7 @@
                 </a:solidFill>
                 <a:latin typeface="PT Sans"/>
               </a:rPr>
-              <a:t>6-класс ›</a:t>
+              <a:t/>
             </a:r>
           </a:p>
           <a:p>
@@ -6605,7 +6605,7 @@
                 </a:solidFill>
                 <a:latin typeface="PT Sans"/>
               </a:rPr>
-              <a:t>6-класс ›</a:t>
+              <a:t/>
             </a:r>
           </a:p>
           <a:p>
@@ -13278,7 +13278,7 @@
                 </a:solidFill>
                 <a:latin typeface="PT Sans"/>
               </a:rPr>
-              <a:t>6-класс ›</a:t>
+              <a:t/>
             </a:r>
           </a:p>
           <a:p>
@@ -16269,7 +16269,7 @@
                 </a:solidFill>
                 <a:latin typeface="PT Sans"/>
               </a:rPr>
-              <a:t>6-класс ›</a:t>
+              <a:t/>
             </a:r>
           </a:p>
           <a:p>
@@ -17852,7 +17852,7 @@
                 </a:solidFill>
                 <a:latin typeface="PT Sans"/>
               </a:rPr>
-              <a:t>6-класс ›</a:t>
+              <a:t/>
             </a:r>
           </a:p>
           <a:p>
@@ -18681,7 +18681,7 @@
                 </a:solidFill>
                 <a:latin typeface="PT Sans"/>
               </a:rPr>
-              <a:t>6-класс ›</a:t>
+              <a:t/>
             </a:r>
           </a:p>
           <a:p>
@@ -19510,7 +19510,7 @@
                 </a:solidFill>
                 <a:latin typeface="PT Sans"/>
               </a:rPr>
-              <a:t>6-класс ›</a:t>
+              <a:t/>
             </a:r>
           </a:p>
           <a:p>
@@ -21176,7 +21176,7 @@
                 </a:solidFill>
                 <a:latin typeface="PT Sans"/>
               </a:rPr>
-              <a:t>6-класс ›</a:t>
+              <a:t/>
             </a:r>
           </a:p>
           <a:p>
@@ -22260,7 +22260,7 @@
                 </a:solidFill>
                 <a:latin typeface="PT Sans"/>
               </a:rPr>
-              <a:t>6-класс ›</a:t>
+              <a:t/>
             </a:r>
           </a:p>
           <a:p>
@@ -23790,7 +23790,7 @@
                 </a:solidFill>
                 <a:latin typeface="PT Sans"/>
               </a:rPr>
-              <a:t>6-класс ›</a:t>
+              <a:t/>
             </a:r>
           </a:p>
           <a:p>
@@ -25294,7 +25294,7 @@
                 </a:solidFill>
                 <a:latin typeface="PT Sans"/>
               </a:rPr>
-              <a:t>6-класс ›</a:t>
+              <a:t/>
             </a:r>
           </a:p>
           <a:p>
@@ -26571,7 +26571,7 @@
                 </a:solidFill>
                 <a:latin typeface="PT Sans"/>
               </a:rPr>
-              <a:t>6-класс ›</a:t>
+              <a:t/>
             </a:r>
           </a:p>
           <a:p>
@@ -27999,7 +27999,7 @@
                 </a:solidFill>
                 <a:latin typeface="PT Sans"/>
               </a:rPr>
-              <a:t>6-класс ›</a:t>
+              <a:t/>
             </a:r>
           </a:p>
           <a:p>
@@ -29455,7 +29455,7 @@
                 </a:solidFill>
                 <a:latin typeface="PT Sans"/>
               </a:rPr>
-              <a:t>6-класс ›</a:t>
+              <a:t/>
             </a:r>
           </a:p>
           <a:p>
@@ -30994,7 +30994,7 @@
                 </a:solidFill>
                 <a:latin typeface="PT Sans"/>
               </a:rPr>
-              <a:t>6-класс ›</a:t>
+              <a:t/>
             </a:r>
           </a:p>
           <a:p>
@@ -31794,7 +31794,7 @@
                 </a:solidFill>
                 <a:latin typeface="PT Sans"/>
               </a:rPr>
-              <a:t>6-класс ›</a:t>
+              <a:t/>
             </a:r>
           </a:p>
           <a:p>
@@ -32635,7 +32635,7 @@
                 </a:solidFill>
                 <a:latin typeface="PT Sans"/>
               </a:rPr>
-              <a:t>6-класс ›</a:t>
+              <a:t/>
             </a:r>
           </a:p>
           <a:p>
@@ -33584,7 +33584,7 @@
                 </a:solidFill>
                 <a:latin typeface="PT Sans"/>
               </a:rPr>
-              <a:t>6-класс ›</a:t>
+              <a:t/>
             </a:r>
           </a:p>
           <a:p>
@@ -35038,7 +35038,7 @@
                 </a:solidFill>
                 <a:latin typeface="PT Sans"/>
               </a:rPr>
-              <a:t>6-класс ›</a:t>
+              <a:t/>
             </a:r>
           </a:p>
           <a:p>
@@ -35784,7 +35784,7 @@
                 </a:solidFill>
                 <a:latin typeface="PT Sans"/>
               </a:rPr>
-              <a:t>6-класс ›</a:t>
+              <a:t/>
             </a:r>
           </a:p>
           <a:p>
@@ -36592,7 +36592,7 @@
                 </a:solidFill>
                 <a:latin typeface="PT Sans"/>
               </a:rPr>
-              <a:t>6-класс ›</a:t>
+              <a:t/>
             </a:r>
           </a:p>
           <a:p>
@@ -37783,7 +37783,7 @@
                 </a:solidFill>
                 <a:latin typeface="PT Sans"/>
               </a:rPr>
-              <a:t>6-класс ›</a:t>
+              <a:t/>
             </a:r>
           </a:p>
           <a:p>
@@ -38962,7 +38962,7 @@
                 </a:solidFill>
                 <a:latin typeface="PT Sans"/>
               </a:rPr>
-              <a:t>6-класс ›</a:t>
+              <a:t/>
             </a:r>
           </a:p>
           <a:p>
@@ -39143,7 +39143,7 @@
                 </a:solidFill>
                 <a:latin typeface="PT Sans"/>
               </a:rPr>
-              <a:t>5-класс</a:t>
+              <a:t/>
             </a:r>
           </a:p>
         </p:txBody>
@@ -39323,7 +39323,7 @@
                 </a:solidFill>
                 <a:latin typeface="PT Sans"/>
               </a:rPr>
-              <a:t>6-класс</a:t>
+              <a:t/>
             </a:r>
           </a:p>
         </p:txBody>
@@ -39503,7 +39503,7 @@
                 </a:solidFill>
                 <a:latin typeface="PT Sans"/>
               </a:rPr>
-              <a:t>6-класс</a:t>
+              <a:t/>
             </a:r>
           </a:p>
         </p:txBody>
@@ -39739,7 +39739,7 @@
                 </a:solidFill>
                 <a:latin typeface="PT Sans"/>
               </a:rPr>
-              <a:t>7-класс</a:t>
+              <a:t/>
             </a:r>
           </a:p>
         </p:txBody>
@@ -40159,7 +40159,7 @@
                 </a:solidFill>
                 <a:latin typeface="PT Sans"/>
               </a:rPr>
-              <a:t>6-класс ›</a:t>
+              <a:t/>
             </a:r>
           </a:p>
           <a:p>
@@ -41307,7 +41307,7 @@
                 </a:solidFill>
                 <a:latin typeface="PT Sans"/>
               </a:rPr>
-              <a:t>6-класс ›</a:t>
+              <a:t/>
             </a:r>
           </a:p>
           <a:p>

--- a/apps/resources/bundled_files/6-klass-payyz-sabak.pptx
+++ b/apps/resources/bundled_files/6-klass-payyz-sabak.pptx
@@ -1582,7 +1582,7 @@
           <a:lstStyle/>
           <a:p>
             <a:r>
-              <a:t>Ой жүгүртүү маданияты (Wenxi Lee, 2.6).</a:t>
+              <a:t>Ой жүгүртүү маданияты (Wenxi Lee, 2,6).</a:t>
             </a:r>
           </a:p>
         </p:txBody>
